--- a/smoke_samples/gopptx_feature_showcase.pptx
+++ b/smoke_samples/gopptx_feature_showcase.pptx
@@ -381,7 +381,7 @@
         <p:spPr>
           <a:xfrm>
             <a:off x="457200" y="274638"/>
-            <a:ext cx="8230200" cy="1143000"/>
+            <a:ext cx="8229600" cy="1143000"/>
           </a:xfrm>
           <a:prstGeom prst="rect">
             <a:avLst/>
@@ -409,7 +409,7 @@
         <p:spPr>
           <a:xfrm>
             <a:off x="457200" y="1600200"/>
-            <a:ext cx="8230200" cy="4572000"/>
+            <a:ext cx="8229600" cy="4572000"/>
           </a:xfrm>
           <a:prstGeom prst="rect">
             <a:avLst/>
@@ -417,14 +417,14 @@
           <a:noFill/>
         </p:spPr>
         <p:txBody>
-          <a:bodyPr wrap="square" rtlCol="0"/>
+          <a:bodyPr wrap="square" rtlCol="0" anchor="t"/>
           <a:lstStyle/>
           <a:p>
             <a:pPr lvl="0" marL="457200" indent="-457200">
               <a:buChar char="•"/>
             </a:pPr>
             <a:r>
-              <a:rPr lang="en-US" sz="2800" b="0" i="0" u="none" dirty="0"/>
+              <a:rPr lang="en-US" sz="1800" b="0" i="0" u="none" dirty="0"/>
               <a:t>Chart parity (13 variants)</a:t>
             </a:r>
           </a:p>
@@ -433,7 +433,7 @@
               <a:buChar char="•"/>
             </a:pPr>
             <a:r>
-              <a:rPr lang="en-US" sz="2800" b="0" i="0" u="none" dirty="0"/>
+              <a:rPr lang="en-US" sz="1800" b="0" i="0" u="none" dirty="0"/>
               <a:t>Slide layouts (title/content, title-only, blank)</a:t>
             </a:r>
           </a:p>
@@ -442,7 +442,7 @@
               <a:buChar char="•"/>
             </a:pPr>
             <a:r>
-              <a:rPr lang="en-US" sz="2800" b="0" i="0" u="none" dirty="0"/>
+              <a:rPr lang="en-US" sz="1800" b="0" i="0" u="none" dirty="0"/>
               <a:t>Table styling + deep border semantics</a:t>
             </a:r>
           </a:p>
@@ -451,7 +451,7 @@
               <a:buChar char="•"/>
             </a:pPr>
             <a:r>
-              <a:rPr lang="en-US" sz="2800" b="0" i="0" u="none" dirty="0"/>
+              <a:rPr lang="en-US" sz="1800" b="0" i="0" u="none" dirty="0"/>
               <a:t>Markdown inline rich text and text-run formatting</a:t>
             </a:r>
           </a:p>
@@ -460,7 +460,7 @@
               <a:buChar char="•"/>
             </a:pPr>
             <a:r>
-              <a:rPr lang="en-US" sz="2800" b="0" i="0" u="none" dirty="0"/>
+              <a:rPr lang="en-US" sz="1800" b="0" i="0" u="none" dirty="0"/>
               <a:t>Shapes/connectors with gradient fill rendering</a:t>
             </a:r>
           </a:p>
@@ -505,7 +505,7 @@
         <p:spPr>
           <a:xfrm>
             <a:off x="457200" y="274638"/>
-            <a:ext cx="8230200" cy="1143000"/>
+            <a:ext cx="8229600" cy="1143000"/>
           </a:xfrm>
           <a:prstGeom prst="rect">
             <a:avLst/>
@@ -533,7 +533,7 @@
         <p:spPr>
           <a:xfrm>
             <a:off x="457200" y="1600200"/>
-            <a:ext cx="8230200" cy="4572000"/>
+            <a:ext cx="8229600" cy="4572000"/>
           </a:xfrm>
           <a:prstGeom prst="rect">
             <a:avLst/>
@@ -541,14 +541,14 @@
           <a:noFill/>
         </p:spPr>
         <p:txBody>
-          <a:bodyPr wrap="square" rtlCol="0"/>
+          <a:bodyPr wrap="square" rtlCol="0" anchor="t"/>
           <a:lstStyle/>
           <a:p>
             <a:pPr lvl="0" marL="457200" indent="-457200">
               <a:buAutoNum type="arabicPeriod"/>
             </a:pPr>
             <a:r>
-              <a:rPr lang="en-US" sz="2800" b="0" i="0" u="none" dirty="0"/>
+              <a:rPr lang="en-US" sz="1800" b="0" i="0" u="none" dirty="0"/>
               <a:t>Numbered item</a:t>
             </a:r>
           </a:p>
@@ -557,7 +557,7 @@
               <a:buAutoNum type="arabicPeriod"/>
             </a:pPr>
             <a:r>
-              <a:rPr lang="en-US" sz="2800" b="0" i="0" u="none" dirty="0"/>
+              <a:rPr lang="en-US" sz="1800" b="0" i="0" u="none" dirty="0"/>
               <a:t>Another item</a:t>
             </a:r>
           </a:p>
@@ -602,7 +602,7 @@
         <p:spPr>
           <a:xfrm>
             <a:off x="457200" y="274638"/>
-            <a:ext cx="8230200" cy="1143000"/>
+            <a:ext cx="8229600" cy="1143000"/>
           </a:xfrm>
           <a:prstGeom prst="rect">
             <a:avLst/>
@@ -690,7 +690,7 @@
         <p:spPr>
           <a:xfrm>
             <a:off x="457200" y="274638"/>
-            <a:ext cx="8230200" cy="1143000"/>
+            <a:ext cx="8229600" cy="1143000"/>
           </a:xfrm>
           <a:prstGeom prst="rect">
             <a:avLst/>
@@ -718,7 +718,7 @@
         <p:spPr>
           <a:xfrm>
             <a:off x="457200" y="1600200"/>
-            <a:ext cx="8230200" cy="4572000"/>
+            <a:ext cx="8229600" cy="4572000"/>
           </a:xfrm>
           <a:prstGeom prst="rect">
             <a:avLst/>
@@ -726,26 +726,26 @@
           <a:noFill/>
         </p:spPr>
         <p:txBody>
-          <a:bodyPr wrap="square" rtlCol="0"/>
+          <a:bodyPr wrap="square" rtlCol="0" anchor="t"/>
           <a:lstStyle/>
           <a:p>
             <a:pPr lvl="0" marL="457200" indent="-457200">
               <a:buChar char="•"/>
             </a:pPr>
             <a:r>
-              <a:rPr lang="en-US" sz="2800" b="1" i="0" u="none" dirty="0"/>
+              <a:rPr lang="en-US" sz="1800" b="1" i="0" u="none" dirty="0"/>
               <a:t>Bold </a:t>
             </a:r>
             <a:r>
-              <a:rPr lang="en-US" sz="2800" b="0" i="1" u="none" dirty="0"/>
+              <a:rPr lang="en-US" sz="1800" b="0" i="1" u="none" dirty="0"/>
               <a:t>Italic </a:t>
             </a:r>
             <a:r>
-              <a:rPr lang="en-US" sz="2800" b="0" i="0" u="sng" dirty="0"/>
+              <a:rPr lang="en-US" sz="1800" b="0" i="0" u="sng" dirty="0"/>
               <a:t>Underline </a:t>
             </a:r>
             <a:r>
-              <a:rPr lang="en-US" sz="2800" b="0" i="0" u="none" dirty="0">
+              <a:rPr lang="en-US" sz="1800" b="0" i="0" u="none" dirty="0">
                 <a:solidFill>
                   <a:srgbClr val="1F4E78"/>
                 </a:solidFill>
@@ -753,7 +753,7 @@
               <a:t>Color </a:t>
             </a:r>
             <a:r>
-              <a:rPr lang="en-US" sz="2800" b="0" i="0" u="none" dirty="0">
+              <a:rPr lang="en-US" sz="1800" b="0" i="0" u="none" dirty="0">
                 <a:latin typeface="Calibri"/>
               </a:rPr>
               <a:t>Custom Font </a:t>
@@ -768,7 +768,7 @@
               <a:buChar char="•"/>
             </a:pPr>
             <a:r>
-              <a:rPr lang="en-US" sz="2800" b="0" i="0" u="none" dirty="0">
+              <a:rPr lang="en-US" sz="1800" b="0" i="0" u="none" dirty="0">
                 <a:latin typeface="Consolas"/>
               </a:rPr>
               <a:t>Inline code style</a:t>
@@ -815,7 +815,7 @@
         <p:spPr>
           <a:xfrm>
             <a:off x="457200" y="274638"/>
-            <a:ext cx="8230200" cy="1143000"/>
+            <a:ext cx="8229600" cy="1143000"/>
           </a:xfrm>
           <a:prstGeom prst="rect">
             <a:avLst/>
@@ -1022,7 +1022,7 @@
         <p:spPr>
           <a:xfrm>
             <a:off x="457200" y="274638"/>
-            <a:ext cx="8230200" cy="1143000"/>
+            <a:ext cx="8229600" cy="1143000"/>
           </a:xfrm>
           <a:prstGeom prst="rect">
             <a:avLst/>
@@ -1095,14 +1095,14 @@
           </a:ln>
         </p:spPr>
         <p:txBody>
-          <a:bodyPr wrap="square" rtlCol="0" anchor="ctr">
+          <a:bodyPr wrap="square" rtlCol="0" anchor="ctr" marL="45720" marT="45720" marR="45720" marB="45720">
             <a:spAutoFit/>
           </a:bodyPr>
           <a:lstStyle/>
           <a:p>
             <a:pPr algn="ctr"/>
             <a:r>
-              <a:rPr lang="en-US" sz="2500" b="0" i="0" u="none" dirty="0">
+              <a:rPr lang="en-US" sz="2200" b="0" i="0" u="none" dirty="0">
                 <a:solidFill>
                   <a:srgbClr val="000000"/>
                 </a:solidFill>
@@ -1146,14 +1146,14 @@
           </a:ln>
         </p:spPr>
         <p:txBody>
-          <a:bodyPr wrap="square" rtlCol="0" anchor="ctr">
+          <a:bodyPr wrap="square" rtlCol="0" anchor="ctr" marL="45720" marT="45720" marR="45720" marB="45720">
             <a:spAutoFit/>
           </a:bodyPr>
           <a:lstStyle/>
           <a:p>
             <a:pPr algn="ctr"/>
             <a:r>
-              <a:rPr lang="en-US" sz="3600" b="0" i="0" u="none" dirty="0">
+              <a:rPr lang="en-US" sz="3200" b="0" i="0" u="none" dirty="0">
                 <a:solidFill>
                   <a:srgbClr val="000000"/>
                 </a:solidFill>
@@ -1238,7 +1238,7 @@
         <p:spPr>
           <a:xfrm>
             <a:off x="457200" y="274638"/>
-            <a:ext cx="8230200" cy="1143000"/>
+            <a:ext cx="8229600" cy="1143000"/>
           </a:xfrm>
           <a:prstGeom prst="rect">
             <a:avLst/>
@@ -1312,7 +1312,7 @@
         <p:spPr>
           <a:xfrm>
             <a:off x="457200" y="274638"/>
-            <a:ext cx="8230200" cy="1143000"/>
+            <a:ext cx="8229600" cy="1143000"/>
           </a:xfrm>
           <a:prstGeom prst="rect">
             <a:avLst/>
@@ -1340,7 +1340,7 @@
         <p:spPr>
           <a:xfrm>
             <a:off x="457200" y="1600200"/>
-            <a:ext cx="8230200" cy="4572000"/>
+            <a:ext cx="8229600" cy="4572000"/>
           </a:xfrm>
           <a:prstGeom prst="rect">
             <a:avLst/>
@@ -1348,14 +1348,14 @@
           <a:noFill/>
         </p:spPr>
         <p:txBody>
-          <a:bodyPr wrap="square" rtlCol="0"/>
+          <a:bodyPr wrap="square" rtlCol="0" anchor="t"/>
           <a:lstStyle/>
           <a:p>
             <a:pPr lvl="0" marL="457200" indent="-457200">
               <a:buChar char="•"/>
             </a:pPr>
             <a:r>
-              <a:rPr lang="en-US" sz="2800" b="0" i="0" u="none" dirty="0"/>
+              <a:rPr lang="en-US" sz="1800" b="0" i="0" u="none" dirty="0"/>
               <a:t>Plain bullet</a:t>
             </a:r>
           </a:p>
@@ -1364,23 +1364,23 @@
               <a:buChar char="•"/>
             </a:pPr>
             <a:r>
-              <a:rPr lang="en-US" sz="2800" b="1" i="0" u="none" dirty="0"/>
+              <a:rPr lang="en-US" sz="1800" b="1" i="0" u="none" dirty="0"/>
               <a:t>Bold</a:t>
             </a:r>
             <a:r>
-              <a:rPr lang="en-US" sz="2800" b="0" i="0" u="none" dirty="0"/>
+              <a:rPr lang="en-US" sz="1800" b="0" i="0" u="none" dirty="0"/>
               <a:t> + </a:t>
             </a:r>
             <a:r>
-              <a:rPr lang="en-US" sz="2800" b="0" i="1" u="none" dirty="0"/>
+              <a:rPr lang="en-US" sz="1800" b="0" i="1" u="none" dirty="0"/>
               <a:t>italic</a:t>
             </a:r>
             <a:r>
-              <a:rPr lang="en-US" sz="2800" b="0" i="0" u="none" dirty="0"/>
+              <a:rPr lang="en-US" sz="1800" b="0" i="0" u="none" dirty="0"/>
               <a:t> + </a:t>
             </a:r>
             <a:r>
-              <a:rPr lang="en-US" sz="2800" b="0" i="0" u="none" dirty="0">
+              <a:rPr lang="en-US" sz="1800" b="0" i="0" u="none" dirty="0">
                 <a:latin typeface="Consolas"/>
               </a:rPr>
               <a:t>code</a:t>
